--- a/projects/sketchvoice-mmsb-graph-product-defense_ppt169_20260614/exports/sketchvoice-mmsb-graph-product-defense_20260614_162618.pptx
+++ b/projects/sketchvoice-mmsb-graph-product-defense_ppt169_20260614/exports/sketchvoice-mmsb-graph-product-defense_20260614_162618.pptx
@@ -4306,6 +4306,12 @@
               <a:noFill/>
             </a:ln>
           </p:spPr>
+          <p:txBody>
+            <a:bodyPr/>
+            <a:p>
+              <a:endParaRPr lang="zh-CN" altLang="en-US"/>
+            </a:p>
+          </p:txBody>
         </p:sp>
         <p:sp>
           <p:nvSpPr>
@@ -25028,10 +25034,10 @@
           </p:nvGrpSpPr>
           <p:grpSpPr>
             <a:xfrm>
-              <a:off x="842010" y="2717006"/>
-              <a:ext cx="9119234" cy="476250"/>
-              <a:chOff x="842010" y="2717006"/>
-              <a:chExt cx="9119234" cy="476250"/>
+              <a:off x="770890" y="2717006"/>
+              <a:ext cx="9190354" cy="476250"/>
+              <a:chOff x="770890" y="2717006"/>
+              <a:chExt cx="9190354" cy="476250"/>
             </a:xfrm>
           </p:grpSpPr>
           <p:sp>
@@ -25042,7 +25048,7 @@
             </p:nvSpPr>
             <p:spPr>
               <a:xfrm>
-                <a:off x="842010" y="2832735"/>
+                <a:off x="770890" y="2832735"/>
                 <a:ext cx="895788" cy="243840"/>
               </a:xfrm>
               <a:prstGeom prst="rect">
@@ -25379,10 +25385,10 @@
           </p:nvGrpSpPr>
           <p:grpSpPr>
             <a:xfrm>
-              <a:off x="842010" y="3440906"/>
-              <a:ext cx="9544538" cy="476250"/>
-              <a:chOff x="842010" y="3440906"/>
-              <a:chExt cx="9544538" cy="476250"/>
+              <a:off x="770890" y="3440906"/>
+              <a:ext cx="9615658" cy="476250"/>
+              <a:chOff x="770890" y="3440906"/>
+              <a:chExt cx="9615658" cy="476250"/>
             </a:xfrm>
           </p:grpSpPr>
           <p:sp>
@@ -25393,7 +25399,7 @@
             </p:nvSpPr>
             <p:spPr>
               <a:xfrm>
-                <a:off x="842010" y="3556635"/>
+                <a:off x="770890" y="3556635"/>
                 <a:ext cx="870585" cy="243840"/>
               </a:xfrm>
               <a:prstGeom prst="rect">
@@ -25730,10 +25736,10 @@
           </p:nvGrpSpPr>
           <p:grpSpPr>
             <a:xfrm>
-              <a:off x="842010" y="4164806"/>
-              <a:ext cx="9906833" cy="476250"/>
-              <a:chOff x="842010" y="4164806"/>
-              <a:chExt cx="9906833" cy="476250"/>
+              <a:off x="694690" y="4164806"/>
+              <a:ext cx="10054153" cy="476250"/>
+              <a:chOff x="694690" y="4164806"/>
+              <a:chExt cx="10054153" cy="476250"/>
             </a:xfrm>
           </p:grpSpPr>
           <p:sp>
@@ -25744,7 +25750,7 @@
             </p:nvSpPr>
             <p:spPr>
               <a:xfrm>
-                <a:off x="842010" y="4280535"/>
+                <a:off x="694690" y="4273550"/>
                 <a:ext cx="1038606" cy="243840"/>
               </a:xfrm>
               <a:prstGeom prst="rect">
